--- a/Used_Car_Price_Prediction_System_Final_Presentation.pptx
+++ b/Used_Car_Price_Prediction_System_Final_Presentation.pptx
@@ -5,18 +5,17 @@
     <p:sldMasterId id="2147483648" r:id="rId1"/>
   </p:sldMasterIdLst>
   <p:notesMasterIdLst>
-    <p:notesMasterId r:id="rId11"/>
+    <p:notesMasterId r:id="rId10"/>
   </p:notesMasterIdLst>
   <p:sldIdLst>
     <p:sldId id="256" r:id="rId2"/>
     <p:sldId id="257" r:id="rId3"/>
-    <p:sldId id="258" r:id="rId4"/>
-    <p:sldId id="259" r:id="rId5"/>
-    <p:sldId id="260" r:id="rId6"/>
-    <p:sldId id="261" r:id="rId7"/>
-    <p:sldId id="262" r:id="rId8"/>
-    <p:sldId id="263" r:id="rId9"/>
-    <p:sldId id="264" r:id="rId10"/>
+    <p:sldId id="259" r:id="rId4"/>
+    <p:sldId id="260" r:id="rId5"/>
+    <p:sldId id="261" r:id="rId6"/>
+    <p:sldId id="262" r:id="rId7"/>
+    <p:sldId id="263" r:id="rId8"/>
+    <p:sldId id="264" r:id="rId9"/>
   </p:sldIdLst>
   <p:sldSz cx="12192000" cy="6858000"/>
   <p:notesSz cx="6858000" cy="9144000"/>
@@ -303,36 +302,7 @@
           <a:bodyPr/>
           <a:lstStyle/>
           <a:p>
-            <a:r>
-              <a:t>[SPEAKER 1 | TIME: ~0:45]</a:t>
-            </a:r>
-          </a:p>
-          <a:p>
-            <a:endParaRPr/>
-          </a:p>
-          <a:p>
-            <a:r>
-              <a:t>"Good morning everyone. Welcome to our presentation. Today, our team is presenting our Used Car Price Prediction System—an automated, data-driven valuation solution built to eliminate pricing guesswork in the automotive marketplace.</a:t>
-            </a:r>
-          </a:p>
-          <a:p>
-            <a:endParaRPr/>
-          </a:p>
-          <a:p>
-            <a:r>
-              <a:t>Setting the right price on pre-owned vehicles is one of the most critical commercial decisions an automotive business makes every single day. We built a complete, production-ready valuation platform that instantly estimates fair market value using real market transaction history. </a:t>
-            </a:r>
-          </a:p>
-          <a:p>
-            <a:endParaRPr/>
-          </a:p>
-          <a:p>
-            <a:r>
-              <a:t>Over the next ten minutes, we will present the core business challenge, our data findings, the models tested, a live system walkthrough, and the concrete business return. Let's begin with the business problem."</a:t>
-            </a:r>
-          </a:p>
-          <a:p>
-            <a:endParaRPr/>
+            <a:endParaRPr dirty="0"/>
           </a:p>
         </p:txBody>
       </p:sp>
@@ -400,54 +370,7 @@
           <a:bodyPr/>
           <a:lstStyle/>
           <a:p>
-            <a:r>
-              <a:t>[SPEAKER 1 | TIME: ~0:55]</a:t>
-            </a:r>
-          </a:p>
-          <a:p>
-            <a:endParaRPr/>
-          </a:p>
-          <a:p>
-            <a:r>
-              <a:t>"Why is vehicle pricing such a difficult problem? </a:t>
-            </a:r>
-          </a:p>
-          <a:p>
-            <a:endParaRPr/>
-          </a:p>
-          <a:p>
-            <a:r>
-              <a:t>Because unlike new cars with fixed MSRP stickers, no two used cars are identical. Two cars made in the same year have vastly different true market values based on mileage, usage intensity, brand equity, and accident history.</a:t>
-            </a:r>
-          </a:p>
-          <a:p>
-            <a:endParaRPr/>
-          </a:p>
-          <a:p>
-            <a:r>
-              <a:t>Today, dealerships rely heavily on manual human estimation. While experienced appraisers possess good intuition, manual appraisals create two expensive business risks:</a:t>
-            </a:r>
-          </a:p>
-          <a:p>
-            <a:r>
-              <a:t>First: Overpricing. When you price a car too high, it sits on the lot. Operating capital is tied up, holding costs increase, and you eventually discount it at a loss.</a:t>
-            </a:r>
-          </a:p>
-          <a:p>
-            <a:r>
-              <a:t>Second: Underpricing. The car sells fast, but you leave thousands of dollars of profit on the table.</a:t>
-            </a:r>
-          </a:p>
-          <a:p>
-            <a:endParaRPr/>
-          </a:p>
-          <a:p>
-            <a:r>
-              <a:t>Our business needed an objective, repeatable valuation standard. I will now show how our platform solves this."</a:t>
-            </a:r>
-          </a:p>
-          <a:p>
-            <a:endParaRPr/>
+            <a:endParaRPr dirty="0"/>
           </a:p>
         </p:txBody>
       </p:sp>
@@ -515,61 +438,7 @@
           <a:bodyPr/>
           <a:lstStyle/>
           <a:p>
-            <a:r>
-              <a:t>[SPEAKER 1 | TIME: ~0:50]</a:t>
-            </a:r>
-          </a:p>
-          <a:p>
-            <a:r>
-              <a:t>[TRANSITION TO SPEAKER 2]</a:t>
-            </a:r>
-          </a:p>
-          <a:p>
-            <a:endParaRPr/>
-          </a:p>
-          <a:p>
-            <a:r>
-              <a:t>"To solve this problem, we developed an intelligent valuation platform.</a:t>
-            </a:r>
-          </a:p>
-          <a:p>
-            <a:endParaRPr/>
-          </a:p>
-          <a:p>
-            <a:r>
-              <a:t>The workflow is simple:</a:t>
-            </a:r>
-          </a:p>
-          <a:p>
-            <a:r>
-              <a:t>1. Staff enter basic vehicle specs: year, mileage, brand, and title condition.</a:t>
-            </a:r>
-          </a:p>
-          <a:p>
-            <a:r>
-              <a:t>2. The engine instantly compares the vehicle against thousands of verified historical transactions.</a:t>
-            </a:r>
-          </a:p>
-          <a:p>
-            <a:r>
-              <a:t>3. The platform outputs an expected market price and a safe negotiation corridor.</a:t>
-            </a:r>
-          </a:p>
-          <a:p>
-            <a:r>
-              <a:t>4. Your sales team closes trade-ins faster and protects company margins.</a:t>
-            </a:r>
-          </a:p>
-          <a:p>
-            <a:endParaRPr/>
-          </a:p>
-          <a:p>
-            <a:r>
-              <a:t>This tool acts as an objective decision-support copilot—keeping final discretion in human hands. I will now hand over to Member 2 to explain how we prepared and validated the underlying data."</a:t>
-            </a:r>
-          </a:p>
-          <a:p>
-            <a:endParaRPr/>
+            <a:endParaRPr dirty="0"/>
           </a:p>
         </p:txBody>
       </p:sp>
@@ -637,48 +506,7 @@
           <a:bodyPr/>
           <a:lstStyle/>
           <a:p>
-            <a:r>
-              <a:t>[SPEAKER 2 | TIME: ~1:15]</a:t>
-            </a:r>
-          </a:p>
-          <a:p>
-            <a:endParaRPr/>
-          </a:p>
-          <a:p>
-            <a:r>
-              <a:t>"Thank you. A valuation engine is only as good as the data powering it.</a:t>
-            </a:r>
-          </a:p>
-          <a:p>
-            <a:endParaRPr/>
-          </a:p>
-          <a:p>
-            <a:r>
-              <a:t>We based our system on an authentic dataset of 4,008 real used vehicle transactions. Before running any predictions, our primary focus was data hygiene:</a:t>
-            </a:r>
-          </a:p>
-          <a:p>
-            <a:r>
-              <a:t>1. Data Cleaning: We filtered out duplicate entries, corrected invalid values, and ensured all vehicle records were clean.</a:t>
-            </a:r>
-          </a:p>
-          <a:p>
-            <a:r>
-              <a:t>2. Price Stabilization: Because vehicles range from $2,500 economy hatchbacks to $300,000 supercars, prices are heavily skewed. We stabilized price curves to ensure luxury cars don't distort estimates for everyday family cars.</a:t>
-            </a:r>
-          </a:p>
-          <a:p>
-            <a:r>
-              <a:t>3. Derived Business Features: We created smart indicators like 'Miles Driven per Year' to distinguish high-wear fleet cars from low-mileage commuter vehicles, along with luxury brand tiers.</a:t>
-            </a:r>
-          </a:p>
-          <a:p>
-            <a:r>
-              <a:t>4. Strict Validation: We held back 802 cars that the system never saw during training, proving that our model performs reliably on future customer inventory."</a:t>
-            </a:r>
-          </a:p>
-          <a:p>
-            <a:endParaRPr/>
+            <a:endParaRPr dirty="0"/>
           </a:p>
         </p:txBody>
       </p:sp>
@@ -746,56 +574,7 @@
           <a:bodyPr/>
           <a:lstStyle/>
           <a:p>
-            <a:r>
-              <a:t>[SPEAKER 2 | TIME: ~1:15]</a:t>
-            </a:r>
-          </a:p>
-          <a:p>
-            <a:r>
-              <a:t>[TRANSITION TO SPEAKER 3]</a:t>
-            </a:r>
-          </a:p>
-          <a:p>
-            <a:endParaRPr/>
-          </a:p>
-          <a:p>
-            <a:r>
-              <a:t>"Our data preparation revealed critical business findings about what moves car prices:</a:t>
-            </a:r>
-          </a:p>
-          <a:p>
-            <a:endParaRPr/>
-          </a:p>
-          <a:p>
-            <a:r>
-              <a:t>1. Age and Usage Rate: A 4-year-old car driven 5,000 miles a year retains much more value than one driven 30,000 miles a year. Age and annual usage must always be assessed together.</a:t>
-            </a:r>
-          </a:p>
-          <a:p>
-            <a:r>
-              <a:t>2. Odometer Mileage: This is the strongest downward anchor, reflecting accumulated physical wear.</a:t>
-            </a:r>
-          </a:p>
-          <a:p>
-            <a:r>
-              <a:t>3. Brand Prestige: Luxury brands hold residual value differently compared to economy brands.</a:t>
-            </a:r>
-          </a:p>
-          <a:p>
-            <a:r>
-              <a:t>4. Title and Accident History: A salvage title or accident triggers an immediate wholesale discount.</a:t>
-            </a:r>
-          </a:p>
-          <a:p>
-            <a:endParaRPr/>
-          </a:p>
-          <a:p>
-            <a:r>
-              <a:t>Because our automated system evaluates all four factors simultaneously, it prevents appraisers from overlooking critical depreciation drivers. I will now hand over to Member 3 to explain the four valuation methods we investigated."</a:t>
-            </a:r>
-          </a:p>
-          <a:p>
-            <a:endParaRPr/>
+            <a:endParaRPr dirty="0"/>
           </a:p>
         </p:txBody>
       </p:sp>
@@ -863,48 +642,7 @@
           <a:bodyPr/>
           <a:lstStyle/>
           <a:p>
-            <a:r>
-              <a:t>[SPEAKER 3 | TIME: ~1:15]</a:t>
-            </a:r>
-          </a:p>
-          <a:p>
-            <a:endParaRPr/>
-          </a:p>
-          <a:p>
-            <a:r>
-              <a:t>"Thank you. When choosing the right valuation engine, our goal was not to pick complex math, but to test four established approaches to find the most dependable engine for business use.</a:t>
-            </a:r>
-          </a:p>
-          <a:p>
-            <a:endParaRPr/>
-          </a:p>
-          <a:p>
-            <a:r>
-              <a:t>We investigated four distinct methods:</a:t>
-            </a:r>
-          </a:p>
-          <a:p>
-            <a:r>
-              <a:t>1. Linear Regression: Assumes price drops in a straight line with age and mileage. It is simple, but car depreciation in the real world is rarely a straight line.</a:t>
-            </a:r>
-          </a:p>
-          <a:p>
-            <a:r>
-              <a:t>2. Decision Tree: Uses simple if-then decision branches. However, single trees are rigid and make erratic price jumps on new cars.</a:t>
-            </a:r>
-          </a:p>
-          <a:p>
-            <a:r>
-              <a:t>3. Random Forest: Creates an entire committee of decision trees and averages their estimates. Much more stable.</a:t>
-            </a:r>
-          </a:p>
-          <a:p>
-            <a:r>
-              <a:t>4. Gradient Boosting: Rather than just averaging trees, it builds trees step-by-step, where each new model learns from and corrects the mistakes of the previous ones. It excels at subtle nuances, like knowing that mileage discounts luxury cars differently than economy cars."</a:t>
-            </a:r>
-          </a:p>
-          <a:p>
-            <a:endParaRPr/>
+            <a:endParaRPr dirty="0"/>
           </a:p>
         </p:txBody>
       </p:sp>
@@ -972,64 +710,7 @@
           <a:bodyPr/>
           <a:lstStyle/>
           <a:p>
-            <a:r>
-              <a:t>[SPEAKER 3 | TIME: ~1:15]</a:t>
-            </a:r>
-          </a:p>
-          <a:p>
-            <a:r>
-              <a:t>[TRANSITION TO SPEAKER 4]</a:t>
-            </a:r>
-          </a:p>
-          <a:p>
-            <a:endParaRPr/>
-          </a:p>
-          <a:p>
-            <a:r>
-              <a:t>"Let us examine the results when all four approaches were evaluated on our 800 unseen test vehicles:</a:t>
-            </a:r>
-          </a:p>
-          <a:p>
-            <a:endParaRPr/>
-          </a:p>
-          <a:p>
-            <a:r>
-              <a:t>- Linear Regression achieved a 59.9% accuracy score—an acceptable baseline, but too rigid to handle complex price curves.</a:t>
-            </a:r>
-          </a:p>
-          <a:p>
-            <a:r>
-              <a:t>- Decision Tree fell behind at 39.3%, proving far too erratic for commercial use.</a:t>
-            </a:r>
-          </a:p>
-          <a:p>
-            <a:r>
-              <a:t>- Random Forest performed well as an ensemble benchmark.</a:t>
-            </a:r>
-          </a:p>
-          <a:p>
-            <a:r>
-              <a:t>- Gradient Boosting demonstrated clear leadership: it achieved an accuracy score of 66.2%, successfully capturing roughly two out of every three dollars of price variation across the entire market.</a:t>
-            </a:r>
-          </a:p>
-          <a:p>
-            <a:endParaRPr/>
-          </a:p>
-          <a:p>
-            <a:r>
-              <a:t>It won because it avoids sudden, erratic appraisal jumps. It smoothly adapts whether evaluating a $15,000 sedan or an $80,000 luxury SUV. </a:t>
-            </a:r>
-          </a:p>
-          <a:p>
-            <a:endParaRPr/>
-          </a:p>
-          <a:p>
-            <a:r>
-              <a:t>I will now hand over to our final member to walk through the selected champion model, the live system demonstration, and our strategic conclusion."</a:t>
-            </a:r>
-          </a:p>
-          <a:p>
-            <a:endParaRPr/>
+            <a:endParaRPr dirty="0"/>
           </a:p>
         </p:txBody>
       </p:sp>
@@ -1097,182 +778,7 @@
           <a:bodyPr/>
           <a:lstStyle/>
           <a:p>
-            <a:r>
-              <a:t>[SPEAKER 4 | TIME: ~1:15]</a:t>
-            </a:r>
-          </a:p>
-          <a:p>
-            <a:endParaRPr/>
-          </a:p>
-          <a:p>
-            <a:r>
-              <a:t>"Thank you. With Gradient Boosting selected as our champion engine, we packaged it into a user-friendly, production-ready web application.</a:t>
-            </a:r>
-          </a:p>
-          <a:p>
-            <a:endParaRPr/>
-          </a:p>
-          <a:p>
-            <a:r>
-              <a:t>Let's see how this works in an everyday dealership scenario:</a:t>
-            </a:r>
-          </a:p>
-          <a:p>
-            <a:r>
-              <a:t>Imagine a customer walks into your showroom to trade in a 2021 BMW with 35,000 miles on the odometer, an automatic transmission, and a clean vehicle title.</a:t>
-            </a:r>
-          </a:p>
-          <a:p>
-            <a:endParaRPr/>
-          </a:p>
-          <a:p>
-            <a:r>
-              <a:t>Your sales representative opens our portal, selects the car's attributes, and clicks 'Compute Market Valuation'. </a:t>
-            </a:r>
-          </a:p>
-          <a:p>
-            <a:r>
-              <a:t>In less than two seconds, the Gradient Boosting engine evaluates the vehicle. </a:t>
-            </a:r>
-          </a:p>
-          <a:p>
-            <a:endParaRPr/>
-          </a:p>
-          <a:p>
-            <a:r>
-              <a:t>As shown on screen, the platform delivers an expected fair market value of $48,250, accompanied by a negotiation corridor of $43,000 to $54,000. It also highlights the key drivers that justify this figure—such as luxury brand equity and the clean title bonus.</a:t>
-            </a:r>
-          </a:p>
-          <a:p>
-            <a:endParaRPr/>
-          </a:p>
-          <a:p>
-            <a:r>
-              <a:t>Every valuation is automatically saved to the dealership database, allowing branch managers to audit recent evaluations or clear resolved records with one click. It requires zero technical expertise for your staff to operate."</a:t>
-            </a:r>
-          </a:p>
-          <a:p>
-            <a:endParaRPr/>
-          </a:p>
-        </p:txBody>
-      </p:sp>
-      <p:sp>
-        <p:nvSpPr>
-          <p:cNvPr id="4" name="Slide Number Placeholder 3"/>
-          <p:cNvSpPr>
-            <a:spLocks noGrp="1"/>
-          </p:cNvSpPr>
-          <p:nvPr>
-            <p:ph type="sldNum" sz="quarter" idx="5"/>
-          </p:nvPr>
-        </p:nvSpPr>
-        <p:spPr/>
-      </p:sp>
-    </p:spTree>
-  </p:cSld>
-  <p:clrMapOvr>
-    <a:masterClrMapping/>
-  </p:clrMapOvr>
-</p:notes>
-</file>
-
-<file path=ppt/notesSlides/notesSlide9.xml><?xml version="1.0" encoding="utf-8"?>
-<p:notes xmlns:a="http://schemas.openxmlformats.org/drawingml/2006/main" xmlns:r="http://schemas.openxmlformats.org/officeDocument/2006/relationships" xmlns:p="http://schemas.openxmlformats.org/presentationml/2006/main">
-  <p:cSld>
-    <p:spTree>
-      <p:nvGrpSpPr>
-        <p:cNvPr id="1" name=""/>
-        <p:cNvGrpSpPr/>
-        <p:nvPr/>
-      </p:nvGrpSpPr>
-      <p:grpSpPr>
-        <a:xfrm>
-          <a:off x="0" y="0"/>
-          <a:ext cx="0" cy="0"/>
-          <a:chOff x="0" y="0"/>
-          <a:chExt cx="0" cy="0"/>
-        </a:xfrm>
-      </p:grpSpPr>
-      <p:sp>
-        <p:nvSpPr>
-          <p:cNvPr id="2" name="Slide Image Placeholder 1"/>
-          <p:cNvSpPr>
-            <a:spLocks noGrp="1" noRot="1" noChangeAspect="1"/>
-          </p:cNvSpPr>
-          <p:nvPr>
-            <p:ph type="sldImg" idx="2"/>
-          </p:nvPr>
-        </p:nvSpPr>
-        <p:spPr/>
-      </p:sp>
-      <p:sp>
-        <p:nvSpPr>
-          <p:cNvPr id="3" name="Notes Placeholder 2"/>
-          <p:cNvSpPr>
-            <a:spLocks noGrp="1"/>
-          </p:cNvSpPr>
-          <p:nvPr>
-            <p:ph type="body" sz="quarter" idx="3"/>
-          </p:nvPr>
-        </p:nvSpPr>
-        <p:spPr/>
-        <p:txBody>
-          <a:bodyPr/>
-          <a:lstStyle/>
-          <a:p>
-            <a:r>
-              <a:t>[SPEAKER 4 | TIME: ~1:15]</a:t>
-            </a:r>
-          </a:p>
-          <a:p>
-            <a:endParaRPr/>
-          </a:p>
-          <a:p>
-            <a:r>
-              <a:t>"To conclude our presentation: our team has delivered a fully functioning, data-backed vehicle valuation platform designed specifically for commercial decision-makers.</a:t>
-            </a:r>
-          </a:p>
-          <a:p>
-            <a:endParaRPr/>
-          </a:p>
-          <a:p>
-            <a:r>
-              <a:t>By replacing subjective appraisal guesswork with empirical market intelligence:</a:t>
-            </a:r>
-          </a:p>
-          <a:p>
-            <a:r>
-              <a:t>1. We increase appraisal speed by over 90%, letting your sales team focus on closing transactions rather than hunting across classified portals.</a:t>
-            </a:r>
-          </a:p>
-          <a:p>
-            <a:r>
-              <a:t>2. We establish unified pricing consistency across every location and every appraiser.</a:t>
-            </a:r>
-          </a:p>
-          <a:p>
-            <a:r>
-              <a:t>3. We protect your company's gross profit margins from the costly pitfalls of overpricing and underpricing.</a:t>
-            </a:r>
-          </a:p>
-          <a:p>
-            <a:endParaRPr/>
-          </a:p>
-          <a:p>
-            <a:r>
-              <a:t>Our recommendation is to deploy this platform as an operational copilot for your appraisal and trade-in teams.</a:t>
-            </a:r>
-          </a:p>
-          <a:p>
-            <a:endParaRPr/>
-          </a:p>
-          <a:p>
-            <a:r>
-              <a:t>Thank you very much for your time and consideration. Our team is now delighted to open the floor to your questions and discussion."</a:t>
-            </a:r>
-          </a:p>
-          <a:p>
-            <a:endParaRPr/>
+            <a:endParaRPr dirty="0"/>
           </a:p>
         </p:txBody>
       </p:sp>
@@ -4604,7 +4110,7 @@
           <a:lstStyle/>
           <a:p>
             <a:pPr algn="ctr"/>
-            <a:endParaRPr/>
+            <a:endParaRPr dirty="0"/>
           </a:p>
         </p:txBody>
       </p:sp>
@@ -4681,6 +4187,7 @@
               </a:defRPr>
             </a:pPr>
             <a:r>
+              <a:rPr lang="en-US" dirty="0"/>
               <a:t>ENTERPRISE INTELLIGENCE ENGINE</a:t>
             </a:r>
           </a:p>
@@ -4696,7 +4203,8 @@
               </a:defRPr>
             </a:pPr>
             <a:r>
-              <a:t>Benchmarked on verified commercial transaction datasets.</a:t>
+              <a:rPr lang="en-US" dirty="0"/>
+              <a:t>                            Benchmarked on verified commercial transaction datasets.</a:t>
             </a:r>
           </a:p>
         </p:txBody>
@@ -4891,6 +4399,7 @@
               </a:defRPr>
             </a:pPr>
             <a:r>
+              <a:rPr dirty="0"/>
               <a:t>THE APPRAISAL CHALLENGE</a:t>
             </a:r>
           </a:p>
@@ -4906,6 +4415,7 @@
               </a:defRPr>
             </a:pPr>
             <a:r>
+              <a:rPr dirty="0"/>
               <a:t>• High Multi-Factor Variance: Every used car has a unique blend of mileage, age, brand prestige, and history.</a:t>
             </a:r>
           </a:p>
@@ -4921,6 +4431,7 @@
               </a:defRPr>
             </a:pPr>
             <a:r>
+              <a:rPr dirty="0"/>
               <a:t>• Inconsistent Evaluations: Different appraisers evaluate the same vehicle differently across branch locations.</a:t>
             </a:r>
           </a:p>
@@ -4936,6 +4447,7 @@
               </a:defRPr>
             </a:pPr>
             <a:r>
+              <a:rPr dirty="0"/>
               <a:t>• Time-Consuming Research: Staff spend 30 to 45 minutes manually cross-checking classified portals per vehicle.</a:t>
             </a:r>
           </a:p>
@@ -4951,6 +4463,7 @@
               </a:defRPr>
             </a:pPr>
             <a:r>
+              <a:rPr dirty="0"/>
               <a:t>• Unpredictable Margins: Subjective pricing leads to volatile, unpredictable gross profit margins.</a:t>
             </a:r>
           </a:p>
@@ -5005,6 +4518,7 @@
               </a:defRPr>
             </a:pPr>
             <a:r>
+              <a:rPr dirty="0"/>
               <a:t>THE DUAL FINANCIAL RISKS</a:t>
             </a:r>
           </a:p>
@@ -5195,7 +4709,12 @@
               </a:defRPr>
             </a:pPr>
             <a:r>
-              <a:t>THE BOTTOM LINE: Subjective appraisal guesswork directly threatens dealership profitability.</a:t>
+              <a:rPr sz="1600" dirty="0"/>
+              <a:t>Subjective appraisal guesswork directly threatens dealership profitability</a:t>
+            </a:r>
+            <a:r>
+              <a:rPr dirty="0"/>
+              <a:t>.</a:t>
             </a:r>
           </a:p>
         </p:txBody>
@@ -5300,7 +4819,7 @@
               </a:defRPr>
             </a:pPr>
             <a:r>
-              <a:t>SOLUTION WORKFLOW</a:t>
+              <a:t>DATA ENGINEERING</a:t>
             </a:r>
           </a:p>
         </p:txBody>
@@ -5336,7 +4855,7 @@
               </a:defRPr>
             </a:pPr>
             <a:r>
-              <a:t>Our Solution: An Automated Valuation Engine</a:t>
+              <a:t>Data Foundation &amp; Preprocessing: Clean, Reliable Intelligence</a:t>
             </a:r>
           </a:p>
         </p:txBody>
@@ -5350,13 +4869,13 @@
         <p:spPr>
           <a:xfrm>
             <a:off x="731520" y="1371600"/>
-            <a:ext cx="10728655" cy="868680"/>
+            <a:ext cx="10728655" cy="685800"/>
           </a:xfrm>
           <a:prstGeom prst="roundRect">
             <a:avLst/>
           </a:prstGeom>
           <a:solidFill>
-            <a:srgbClr val="2563EB"/>
+            <a:srgbClr val="0F172A"/>
           </a:solidFill>
           <a:ln>
             <a:noFill/>
@@ -5381,14 +4900,14 @@
           <a:lstStyle/>
           <a:p>
             <a:pPr algn="ctr">
-              <a:defRPr sz="1300" b="1">
-                <a:solidFill>
-                  <a:srgbClr val="FFFFFF"/>
-                </a:solidFill>
-              </a:defRPr>
-            </a:pPr>
-            <a:r>
-              <a:t>"An automated platform referencing thousands of verified transactions to calculate fair market prices in seconds."</a:t>
+              <a:defRPr sz="1150" b="1">
+                <a:solidFill>
+                  <a:srgbClr val="0EA5E9"/>
+                </a:solidFill>
+              </a:defRPr>
+            </a:pPr>
+            <a:r>
+              <a:t>DATA FOUNDATION: 4,008 REAL CAR SALES   |   3,206 TRAINING SAMPLES   |   802 UNTOUCHED TEST BENCHMARK</a:t>
             </a:r>
           </a:p>
         </p:txBody>
@@ -5401,8 +4920,8 @@
         </p:nvSpPr>
         <p:spPr>
           <a:xfrm>
-            <a:off x="731520" y="2423160"/>
-            <a:ext cx="2560320" cy="1828800"/>
+            <a:off x="731520" y="2286000"/>
+            <a:ext cx="5212080" cy="1508760"/>
           </a:xfrm>
           <a:prstGeom prst="roundRect">
             <a:avLst/>
@@ -5431,37 +4950,63 @@
           </a:fontRef>
         </p:style>
         <p:txBody>
-          <a:bodyPr lIns="228600" tIns="182880" rtlCol="0" anchor="ctr"/>
+          <a:bodyPr lIns="274320" tIns="164592" rtlCol="0" anchor="ctr"/>
           <a:lstStyle/>
           <a:p>
             <a:pPr algn="ctr">
               <a:defRPr sz="1100" b="1">
                 <a:solidFill>
-                  <a:srgbClr val="0F172A"/>
-                </a:solidFill>
-              </a:defRPr>
-            </a:pPr>
-            <a:r>
-              <a:t>1. VEHICLE INTAKE</a:t>
+                  <a:srgbClr val="2563EB"/>
+                </a:solidFill>
+              </a:defRPr>
+            </a:pPr>
+            <a:r>
+              <a:t>1. DATA CLEANING &amp; QUALITY CONTROL</a:t>
             </a:r>
           </a:p>
           <a:p>
             <a:pPr>
               <a:spcBef>
-                <a:spcPts val="600"/>
+                <a:spcPts val="300"/>
               </a:spcBef>
-              <a:defRPr sz="1000">
+              <a:defRPr sz="950">
                 <a:solidFill>
                   <a:srgbClr val="64748B"/>
                 </a:solidFill>
               </a:defRPr>
             </a:pPr>
             <a:r>
-              <a:t>Enter simple specs:</a:t>
-            </a:r>
-            <a:br/>
-            <a:r>
-              <a:t>Year, mileage, brand, title status, transmission.</a:t>
+              <a:t>• Filtered duplicate listings and verified vehicle records.</a:t>
+            </a:r>
+          </a:p>
+          <a:p>
+            <a:pPr>
+              <a:spcBef>
+                <a:spcPts val="300"/>
+              </a:spcBef>
+              <a:defRPr sz="950">
+                <a:solidFill>
+                  <a:srgbClr val="64748B"/>
+                </a:solidFill>
+              </a:defRPr>
+            </a:pPr>
+            <a:r>
+              <a:t>• Handled missing attributes with representative statistical medians.</a:t>
+            </a:r>
+          </a:p>
+          <a:p>
+            <a:pPr>
+              <a:spcBef>
+                <a:spcPts val="300"/>
+              </a:spcBef>
+              <a:defRPr sz="950">
+                <a:solidFill>
+                  <a:srgbClr val="64748B"/>
+                </a:solidFill>
+              </a:defRPr>
+            </a:pPr>
+            <a:r>
+              <a:t>• Ensured only complete, verified market profiles entered the pipeline.</a:t>
             </a:r>
           </a:p>
         </p:txBody>
@@ -5474,8 +5019,8 @@
         </p:nvSpPr>
         <p:spPr>
           <a:xfrm>
-            <a:off x="3520439" y="2423160"/>
-            <a:ext cx="2560320" cy="1828800"/>
+            <a:off x="6217920" y="2286000"/>
+            <a:ext cx="5212080" cy="1508760"/>
           </a:xfrm>
           <a:prstGeom prst="roundRect">
             <a:avLst/>
@@ -5504,33 +5049,63 @@
           </a:fontRef>
         </p:style>
         <p:txBody>
-          <a:bodyPr lIns="228600" tIns="182880" rtlCol="0" anchor="ctr"/>
+          <a:bodyPr lIns="274320" tIns="164592" rtlCol="0" anchor="ctr"/>
           <a:lstStyle/>
           <a:p>
             <a:pPr algn="ctr">
               <a:defRPr sz="1100" b="1">
                 <a:solidFill>
-                  <a:srgbClr val="0F172A"/>
-                </a:solidFill>
-              </a:defRPr>
-            </a:pPr>
-            <a:r>
-              <a:t>2. VALUATION ENGINE</a:t>
+                  <a:srgbClr val="2563EB"/>
+                </a:solidFill>
+              </a:defRPr>
+            </a:pPr>
+            <a:r>
+              <a:t>2. TARGET PRICE STABILIZATION</a:t>
             </a:r>
           </a:p>
           <a:p>
             <a:pPr>
               <a:spcBef>
-                <a:spcPts val="600"/>
+                <a:spcPts val="300"/>
               </a:spcBef>
-              <a:defRPr sz="1000">
+              <a:defRPr sz="950">
                 <a:solidFill>
                   <a:srgbClr val="64748B"/>
                 </a:solidFill>
               </a:defRPr>
             </a:pPr>
             <a:r>
-              <a:t>Instantly benchmarked against thousands of market transactions.</a:t>
+              <a:t>• Used car prices span from $2,500 commuters to $300,000+ luxury cars.</a:t>
+            </a:r>
+          </a:p>
+          <a:p>
+            <a:pPr>
+              <a:spcBef>
+                <a:spcPts val="300"/>
+              </a:spcBef>
+              <a:defRPr sz="950">
+                <a:solidFill>
+                  <a:srgbClr val="64748B"/>
+                </a:solidFill>
+              </a:defRPr>
+            </a:pPr>
+            <a:r>
+              <a:t>• Normalized price distribution using logarithmic scaling.</a:t>
+            </a:r>
+          </a:p>
+          <a:p>
+            <a:pPr>
+              <a:spcBef>
+                <a:spcPts val="300"/>
+              </a:spcBef>
+              <a:defRPr sz="950">
+                <a:solidFill>
+                  <a:srgbClr val="64748B"/>
+                </a:solidFill>
+              </a:defRPr>
+            </a:pPr>
+            <a:r>
+              <a:t>• Prevents extreme exotic outliers from distorting everyday car estimates.</a:t>
             </a:r>
           </a:p>
         </p:txBody>
@@ -5543,8 +5118,8 @@
         </p:nvSpPr>
         <p:spPr>
           <a:xfrm>
-            <a:off x="6309359" y="2423160"/>
-            <a:ext cx="2560320" cy="1828800"/>
+            <a:off x="731520" y="3931920"/>
+            <a:ext cx="5212080" cy="1508760"/>
           </a:xfrm>
           <a:prstGeom prst="roundRect">
             <a:avLst/>
@@ -5573,33 +5148,63 @@
           </a:fontRef>
         </p:style>
         <p:txBody>
-          <a:bodyPr lIns="228600" tIns="182880" rtlCol="0" anchor="ctr"/>
+          <a:bodyPr lIns="274320" tIns="164592" rtlCol="0" anchor="ctr"/>
           <a:lstStyle/>
           <a:p>
             <a:pPr algn="ctr">
               <a:defRPr sz="1100" b="1">
                 <a:solidFill>
-                  <a:srgbClr val="0F172A"/>
-                </a:solidFill>
-              </a:defRPr>
-            </a:pPr>
-            <a:r>
-              <a:t>3. RECOMMENDED PRICE</a:t>
+                  <a:srgbClr val="2563EB"/>
+                </a:solidFill>
+              </a:defRPr>
+            </a:pPr>
+            <a:r>
+              <a:t>3. DERIVED BUSINESS INDICATORS</a:t>
             </a:r>
           </a:p>
           <a:p>
             <a:pPr>
               <a:spcBef>
-                <a:spcPts val="600"/>
+                <a:spcPts val="300"/>
               </a:spcBef>
-              <a:defRPr sz="1000">
+              <a:defRPr sz="950">
                 <a:solidFill>
                   <a:srgbClr val="64748B"/>
                 </a:solidFill>
               </a:defRPr>
             </a:pPr>
             <a:r>
-              <a:t>Generates fair market value plus a safe negotiation band.</a:t>
+              <a:t>• Engineered 'Miles per Year' to separate heavy fleet wear from commuter cars.</a:t>
+            </a:r>
+          </a:p>
+          <a:p>
+            <a:pPr>
+              <a:spcBef>
+                <a:spcPts val="300"/>
+              </a:spcBef>
+              <a:defRPr sz="950">
+                <a:solidFill>
+                  <a:srgbClr val="64748B"/>
+                </a:solidFill>
+              </a:defRPr>
+            </a:pPr>
+            <a:r>
+              <a:t>• Flagged Luxury Brand tiers to capture distinct luxury depreciation behavior.</a:t>
+            </a:r>
+          </a:p>
+          <a:p>
+            <a:pPr>
+              <a:spcBef>
+                <a:spcPts val="300"/>
+              </a:spcBef>
+              <a:defRPr sz="950">
+                <a:solidFill>
+                  <a:srgbClr val="64748B"/>
+                </a:solidFill>
+              </a:defRPr>
+            </a:pPr>
+            <a:r>
+              <a:t>• Encoded transmission, fuel type, and clean title status into market signals.</a:t>
             </a:r>
           </a:p>
         </p:txBody>
@@ -5612,8 +5217,107 @@
         </p:nvSpPr>
         <p:spPr>
           <a:xfrm>
-            <a:off x="9098280" y="2423160"/>
-            <a:ext cx="2560320" cy="1828800"/>
+            <a:off x="6217920" y="3931920"/>
+            <a:ext cx="5212080" cy="1508760"/>
+          </a:xfrm>
+          <a:prstGeom prst="roundRect">
+            <a:avLst/>
+          </a:prstGeom>
+          <a:solidFill>
+            <a:srgbClr val="FFFFFF"/>
+          </a:solidFill>
+          <a:ln>
+            <a:solidFill>
+              <a:srgbClr val="E2E8F0"/>
+            </a:solidFill>
+          </a:ln>
+        </p:spPr>
+        <p:style>
+          <a:lnRef idx="1">
+            <a:schemeClr val="accent1"/>
+          </a:lnRef>
+          <a:fillRef idx="3">
+            <a:schemeClr val="accent1"/>
+          </a:fillRef>
+          <a:effectRef idx="2">
+            <a:schemeClr val="accent1"/>
+          </a:effectRef>
+          <a:fontRef idx="minor">
+            <a:schemeClr val="lt1"/>
+          </a:fontRef>
+        </p:style>
+        <p:txBody>
+          <a:bodyPr lIns="274320" tIns="164592" rtlCol="0" anchor="ctr"/>
+          <a:lstStyle/>
+          <a:p>
+            <a:pPr algn="ctr">
+              <a:defRPr sz="1100" b="1">
+                <a:solidFill>
+                  <a:srgbClr val="2563EB"/>
+                </a:solidFill>
+              </a:defRPr>
+            </a:pPr>
+            <a:r>
+              <a:t>4. STRICT UNSEEN BENCHMARK</a:t>
+            </a:r>
+          </a:p>
+          <a:p>
+            <a:pPr>
+              <a:spcBef>
+                <a:spcPts val="300"/>
+              </a:spcBef>
+              <a:defRPr sz="950">
+                <a:solidFill>
+                  <a:srgbClr val="64748B"/>
+                </a:solidFill>
+              </a:defRPr>
+            </a:pPr>
+            <a:r>
+              <a:t>• Reserved 20% of all data (802 vehicles) completely untouched.</a:t>
+            </a:r>
+          </a:p>
+          <a:p>
+            <a:pPr>
+              <a:spcBef>
+                <a:spcPts val="300"/>
+              </a:spcBef>
+              <a:defRPr sz="950">
+                <a:solidFill>
+                  <a:srgbClr val="64748B"/>
+                </a:solidFill>
+              </a:defRPr>
+            </a:pPr>
+            <a:r>
+              <a:t>• Evaluated models strictly on unseen cars to simulate live customer arrivals.</a:t>
+            </a:r>
+          </a:p>
+          <a:p>
+            <a:pPr>
+              <a:spcBef>
+                <a:spcPts val="300"/>
+              </a:spcBef>
+              <a:defRPr sz="950">
+                <a:solidFill>
+                  <a:srgbClr val="64748B"/>
+                </a:solidFill>
+              </a:defRPr>
+            </a:pPr>
+            <a:r>
+              <a:t>• Guarantees that reported accuracy reflects real-world commercial performance.</a:t>
+            </a:r>
+          </a:p>
+        </p:txBody>
+      </p:sp>
+      <p:sp>
+        <p:nvSpPr>
+          <p:cNvPr id="10" name="Rounded Rectangle 9"/>
+          <p:cNvSpPr/>
+          <p:nvPr/>
+        </p:nvSpPr>
+        <p:spPr>
+          <a:xfrm>
+            <a:off x="731520" y="5623560"/>
+            <a:ext cx="10728655" cy="594360"/>
           </a:xfrm>
           <a:prstGeom prst="roundRect">
             <a:avLst/>
@@ -5642,240 +5346,18 @@
           </a:fontRef>
         </p:style>
         <p:txBody>
-          <a:bodyPr lIns="228600" tIns="182880" rtlCol="0" anchor="ctr"/>
+          <a:bodyPr rtlCol="0" anchor="ctr"/>
           <a:lstStyle/>
           <a:p>
             <a:pPr algn="ctr">
-              <a:defRPr sz="1100" b="1">
+              <a:defRPr sz="1050" b="1">
                 <a:solidFill>
                   <a:srgbClr val="2563EB"/>
                 </a:solidFill>
               </a:defRPr>
             </a:pPr>
             <a:r>
-              <a:t>4. PROFITABLE DEAL</a:t>
-            </a:r>
-          </a:p>
-          <a:p>
-            <a:pPr>
-              <a:spcBef>
-                <a:spcPts val="600"/>
-              </a:spcBef>
-              <a:defRPr sz="1000">
-                <a:solidFill>
-                  <a:srgbClr val="64748B"/>
-                </a:solidFill>
-              </a:defRPr>
-            </a:pPr>
-            <a:r>
-              <a:t>Appraisers close trade-ins faster and protect gross margins.</a:t>
-            </a:r>
-          </a:p>
-        </p:txBody>
-      </p:sp>
-      <p:sp>
-        <p:nvSpPr>
-          <p:cNvPr id="10" name="Rounded Rectangle 9"/>
-          <p:cNvSpPr/>
-          <p:nvPr/>
-        </p:nvSpPr>
-        <p:spPr>
-          <a:xfrm>
-            <a:off x="731520" y="4480560"/>
-            <a:ext cx="3474720" cy="1554480"/>
-          </a:xfrm>
-          <a:prstGeom prst="roundRect">
-            <a:avLst/>
-          </a:prstGeom>
-          <a:solidFill>
-            <a:srgbClr val="FFFFFF"/>
-          </a:solidFill>
-          <a:ln>
-            <a:solidFill>
-              <a:srgbClr val="E2E8F0"/>
-            </a:solidFill>
-          </a:ln>
-        </p:spPr>
-        <p:style>
-          <a:lnRef idx="1">
-            <a:schemeClr val="accent1"/>
-          </a:lnRef>
-          <a:fillRef idx="3">
-            <a:schemeClr val="accent1"/>
-          </a:fillRef>
-          <a:effectRef idx="2">
-            <a:schemeClr val="accent1"/>
-          </a:effectRef>
-          <a:fontRef idx="minor">
-            <a:schemeClr val="lt1"/>
-          </a:fontRef>
-        </p:style>
-        <p:txBody>
-          <a:bodyPr lIns="228600" tIns="228600" rtlCol="0" anchor="ctr"/>
-          <a:lstStyle/>
-          <a:p>
-            <a:pPr algn="ctr">
-              <a:defRPr sz="1300" b="1">
-                <a:solidFill>
-                  <a:srgbClr val="2563EB"/>
-                </a:solidFill>
-              </a:defRPr>
-            </a:pPr>
-            <a:r>
-              <a:t>⚡ &lt; 2 Seconds</a:t>
-            </a:r>
-          </a:p>
-          <a:p>
-            <a:pPr>
-              <a:spcBef>
-                <a:spcPts val="600"/>
-              </a:spcBef>
-              <a:defRPr sz="1000">
-                <a:solidFill>
-                  <a:srgbClr val="64748B"/>
-                </a:solidFill>
-              </a:defRPr>
-            </a:pPr>
-            <a:r>
-              <a:t>Instant valuation vs 30+ minutes of manual search</a:t>
-            </a:r>
-          </a:p>
-        </p:txBody>
-      </p:sp>
-      <p:sp>
-        <p:nvSpPr>
-          <p:cNvPr id="11" name="Rounded Rectangle 10"/>
-          <p:cNvSpPr/>
-          <p:nvPr/>
-        </p:nvSpPr>
-        <p:spPr>
-          <a:xfrm>
-            <a:off x="4434840" y="4480560"/>
-            <a:ext cx="3474720" cy="1554480"/>
-          </a:xfrm>
-          <a:prstGeom prst="roundRect">
-            <a:avLst/>
-          </a:prstGeom>
-          <a:solidFill>
-            <a:srgbClr val="FFFFFF"/>
-          </a:solidFill>
-          <a:ln>
-            <a:solidFill>
-              <a:srgbClr val="E2E8F0"/>
-            </a:solidFill>
-          </a:ln>
-        </p:spPr>
-        <p:style>
-          <a:lnRef idx="1">
-            <a:schemeClr val="accent1"/>
-          </a:lnRef>
-          <a:fillRef idx="3">
-            <a:schemeClr val="accent1"/>
-          </a:fillRef>
-          <a:effectRef idx="2">
-            <a:schemeClr val="accent1"/>
-          </a:effectRef>
-          <a:fontRef idx="minor">
-            <a:schemeClr val="lt1"/>
-          </a:fontRef>
-        </p:style>
-        <p:txBody>
-          <a:bodyPr lIns="228600" tIns="228600" rtlCol="0" anchor="ctr"/>
-          <a:lstStyle/>
-          <a:p>
-            <a:pPr algn="ctr">
-              <a:defRPr sz="1300" b="1">
-                <a:solidFill>
-                  <a:srgbClr val="2563EB"/>
-                </a:solidFill>
-              </a:defRPr>
-            </a:pPr>
-            <a:r>
-              <a:t>🎯 100% Unified</a:t>
-            </a:r>
-          </a:p>
-          <a:p>
-            <a:pPr>
-              <a:spcBef>
-                <a:spcPts val="600"/>
-              </a:spcBef>
-              <a:defRPr sz="1000">
-                <a:solidFill>
-                  <a:srgbClr val="64748B"/>
-                </a:solidFill>
-              </a:defRPr>
-            </a:pPr>
-            <a:r>
-              <a:t>Consistent pricing standards across all branches</a:t>
-            </a:r>
-          </a:p>
-        </p:txBody>
-      </p:sp>
-      <p:sp>
-        <p:nvSpPr>
-          <p:cNvPr id="12" name="Rounded Rectangle 11"/>
-          <p:cNvSpPr/>
-          <p:nvPr/>
-        </p:nvSpPr>
-        <p:spPr>
-          <a:xfrm>
-            <a:off x="8138160" y="4480560"/>
-            <a:ext cx="3474720" cy="1554480"/>
-          </a:xfrm>
-          <a:prstGeom prst="roundRect">
-            <a:avLst/>
-          </a:prstGeom>
-          <a:solidFill>
-            <a:srgbClr val="FFFFFF"/>
-          </a:solidFill>
-          <a:ln>
-            <a:solidFill>
-              <a:srgbClr val="E2E8F0"/>
-            </a:solidFill>
-          </a:ln>
-        </p:spPr>
-        <p:style>
-          <a:lnRef idx="1">
-            <a:schemeClr val="accent1"/>
-          </a:lnRef>
-          <a:fillRef idx="3">
-            <a:schemeClr val="accent1"/>
-          </a:fillRef>
-          <a:effectRef idx="2">
-            <a:schemeClr val="accent1"/>
-          </a:effectRef>
-          <a:fontRef idx="minor">
-            <a:schemeClr val="lt1"/>
-          </a:fontRef>
-        </p:style>
-        <p:txBody>
-          <a:bodyPr lIns="228600" tIns="228600" rtlCol="0" anchor="ctr"/>
-          <a:lstStyle/>
-          <a:p>
-            <a:pPr algn="ctr">
-              <a:defRPr sz="1300" b="1">
-                <a:solidFill>
-                  <a:srgbClr val="2563EB"/>
-                </a:solidFill>
-              </a:defRPr>
-            </a:pPr>
-            <a:r>
-              <a:t>🛡️ Decision Copilot</a:t>
-            </a:r>
-          </a:p>
-          <a:p>
-            <a:pPr>
-              <a:spcBef>
-                <a:spcPts val="600"/>
-              </a:spcBef>
-              <a:defRPr sz="1000">
-                <a:solidFill>
-                  <a:srgbClr val="64748B"/>
-                </a:solidFill>
-              </a:defRPr>
-            </a:pPr>
-            <a:r>
-              <a:t>Empowers staff while keeping final judgment in human hands</a:t>
+              <a:t>KEY TAKEAWAY: Rigorous data preprocessing ensures the system learns genuine market behavior rather than statistical noise.</a:t>
             </a:r>
           </a:p>
         </p:txBody>
@@ -5980,7 +5462,7 @@
               </a:defRPr>
             </a:pPr>
             <a:r>
-              <a:t>DATA ENGINEERING</a:t>
+              <a:t>MARKET DISCOVERIES</a:t>
             </a:r>
           </a:p>
         </p:txBody>
@@ -6016,7 +5498,7 @@
               </a:defRPr>
             </a:pPr>
             <a:r>
-              <a:t>Data Foundation &amp; Preprocessing: Clean, Reliable Intelligence</a:t>
+              <a:t>Key Market Drivers: What Truly Dictates Vehicle Resale Value?</a:t>
             </a:r>
           </a:p>
         </p:txBody>
@@ -6029,60 +5511,8 @@
         </p:nvSpPr>
         <p:spPr>
           <a:xfrm>
-            <a:off x="731520" y="1371600"/>
-            <a:ext cx="10728655" cy="685800"/>
-          </a:xfrm>
-          <a:prstGeom prst="roundRect">
-            <a:avLst/>
-          </a:prstGeom>
-          <a:solidFill>
-            <a:srgbClr val="0F172A"/>
-          </a:solidFill>
-          <a:ln>
-            <a:noFill/>
-          </a:ln>
-        </p:spPr>
-        <p:style>
-          <a:lnRef idx="1">
-            <a:schemeClr val="accent1"/>
-          </a:lnRef>
-          <a:fillRef idx="3">
-            <a:schemeClr val="accent1"/>
-          </a:fillRef>
-          <a:effectRef idx="2">
-            <a:schemeClr val="accent1"/>
-          </a:effectRef>
-          <a:fontRef idx="minor">
-            <a:schemeClr val="lt1"/>
-          </a:fontRef>
-        </p:style>
-        <p:txBody>
-          <a:bodyPr rtlCol="0" anchor="ctr"/>
-          <a:lstStyle/>
-          <a:p>
-            <a:pPr algn="ctr">
-              <a:defRPr sz="1150" b="1">
-                <a:solidFill>
-                  <a:srgbClr val="0EA5E9"/>
-                </a:solidFill>
-              </a:defRPr>
-            </a:pPr>
-            <a:r>
-              <a:t>DATA FOUNDATION: 4,008 REAL CAR SALES   |   3,206 TRAINING SAMPLES   |   802 UNTOUCHED TEST BENCHMARK</a:t>
-            </a:r>
-          </a:p>
-        </p:txBody>
-      </p:sp>
-      <p:sp>
-        <p:nvSpPr>
-          <p:cNvPr id="6" name="Rounded Rectangle 5"/>
-          <p:cNvSpPr/>
-          <p:nvPr/>
-        </p:nvSpPr>
-        <p:spPr>
-          <a:xfrm>
-            <a:off x="731520" y="2286000"/>
-            <a:ext cx="5212080" cy="1508760"/>
+            <a:off x="731520" y="1463040"/>
+            <a:ext cx="2560320" cy="3931920"/>
           </a:xfrm>
           <a:prstGeom prst="roundRect">
             <a:avLst/>
@@ -6111,7 +5541,7 @@
           </a:fontRef>
         </p:style>
         <p:txBody>
-          <a:bodyPr lIns="274320" tIns="164592" rtlCol="0" anchor="ctr"/>
+          <a:bodyPr lIns="182880" tIns="228600" rtlCol="0" anchor="ctr"/>
           <a:lstStyle/>
           <a:p>
             <a:pPr algn="ctr">
@@ -6122,66 +5552,66 @@
               </a:defRPr>
             </a:pPr>
             <a:r>
-              <a:t>1. DATA CLEANING &amp; QUALITY CONTROL</a:t>
+              <a:t>01. AGE &amp; USAGE INTENSITY</a:t>
             </a:r>
           </a:p>
           <a:p>
             <a:pPr>
               <a:spcBef>
-                <a:spcPts val="300"/>
+                <a:spcPts val="800"/>
               </a:spcBef>
-              <a:defRPr sz="950">
+              <a:defRPr sz="1000">
                 <a:solidFill>
                   <a:srgbClr val="64748B"/>
                 </a:solidFill>
               </a:defRPr>
             </a:pPr>
             <a:r>
-              <a:t>• Filtered duplicate listings and verified vehicle records.</a:t>
+              <a:t>• Year-over-year mechanical and technological depreciation.</a:t>
             </a:r>
           </a:p>
           <a:p>
             <a:pPr>
               <a:spcBef>
-                <a:spcPts val="300"/>
+                <a:spcPts val="800"/>
               </a:spcBef>
-              <a:defRPr sz="950">
+              <a:defRPr sz="1000">
                 <a:solidFill>
                   <a:srgbClr val="64748B"/>
                 </a:solidFill>
               </a:defRPr>
             </a:pPr>
             <a:r>
-              <a:t>• Handled missing attributes with representative statistical medians.</a:t>
+              <a:t>• Annual usage rate differentiates commuter cars from fleet wear.</a:t>
             </a:r>
           </a:p>
           <a:p>
             <a:pPr>
               <a:spcBef>
-                <a:spcPts val="300"/>
+                <a:spcPts val="800"/>
               </a:spcBef>
-              <a:defRPr sz="950">
+              <a:defRPr sz="1000">
                 <a:solidFill>
                   <a:srgbClr val="64748B"/>
                 </a:solidFill>
               </a:defRPr>
             </a:pPr>
             <a:r>
-              <a:t>• Ensured only complete, verified market profiles entered the pipeline.</a:t>
-            </a:r>
-          </a:p>
-        </p:txBody>
-      </p:sp>
-      <p:sp>
-        <p:nvSpPr>
-          <p:cNvPr id="7" name="Rounded Rectangle 6"/>
+              <a:t>• Age alone is misleading without knowing yearly usage intensity.</a:t>
+            </a:r>
+          </a:p>
+        </p:txBody>
+      </p:sp>
+      <p:sp>
+        <p:nvSpPr>
+          <p:cNvPr id="6" name="Rounded Rectangle 5"/>
           <p:cNvSpPr/>
           <p:nvPr/>
         </p:nvSpPr>
         <p:spPr>
           <a:xfrm>
-            <a:off x="6217920" y="2286000"/>
-            <a:ext cx="5212080" cy="1508760"/>
+            <a:off x="3520439" y="1463040"/>
+            <a:ext cx="2560320" cy="3931920"/>
           </a:xfrm>
           <a:prstGeom prst="roundRect">
             <a:avLst/>
@@ -6210,7 +5640,7 @@
           </a:fontRef>
         </p:style>
         <p:txBody>
-          <a:bodyPr lIns="274320" tIns="164592" rtlCol="0" anchor="ctr"/>
+          <a:bodyPr lIns="182880" tIns="228600" rtlCol="0" anchor="ctr"/>
           <a:lstStyle/>
           <a:p>
             <a:pPr algn="ctr">
@@ -6221,66 +5651,66 @@
               </a:defRPr>
             </a:pPr>
             <a:r>
-              <a:t>2. TARGET PRICE STABILIZATION</a:t>
+              <a:t>02. ODOMETER MILEAGE</a:t>
             </a:r>
           </a:p>
           <a:p>
             <a:pPr>
               <a:spcBef>
-                <a:spcPts val="300"/>
+                <a:spcPts val="800"/>
               </a:spcBef>
-              <a:defRPr sz="950">
+              <a:defRPr sz="1000">
                 <a:solidFill>
                   <a:srgbClr val="64748B"/>
                 </a:solidFill>
               </a:defRPr>
             </a:pPr>
             <a:r>
-              <a:t>• Used car prices span from $2,500 commuters to $300,000+ luxury cars.</a:t>
+              <a:t>• Primary indicator of physical mechanical wear.</a:t>
             </a:r>
           </a:p>
           <a:p>
             <a:pPr>
               <a:spcBef>
-                <a:spcPts val="300"/>
+                <a:spcPts val="800"/>
               </a:spcBef>
-              <a:defRPr sz="950">
+              <a:defRPr sz="1000">
                 <a:solidFill>
                   <a:srgbClr val="64748B"/>
                 </a:solidFill>
               </a:defRPr>
             </a:pPr>
             <a:r>
-              <a:t>• Normalized price distribution using logarithmic scaling.</a:t>
+              <a:t>• Strongest day-to-day downward price driver.</a:t>
             </a:r>
           </a:p>
           <a:p>
             <a:pPr>
               <a:spcBef>
-                <a:spcPts val="300"/>
+                <a:spcPts val="800"/>
               </a:spcBef>
-              <a:defRPr sz="950">
+              <a:defRPr sz="1000">
                 <a:solidFill>
                   <a:srgbClr val="64748B"/>
                 </a:solidFill>
               </a:defRPr>
             </a:pPr>
             <a:r>
-              <a:t>• Prevents extreme exotic outliers from distorting everyday car estimates.</a:t>
-            </a:r>
-          </a:p>
-        </p:txBody>
-      </p:sp>
-      <p:sp>
-        <p:nvSpPr>
-          <p:cNvPr id="8" name="Rounded Rectangle 7"/>
+              <a:t>• Depreciation penalty naturally flattens at higher mileage thresholds.</a:t>
+            </a:r>
+          </a:p>
+        </p:txBody>
+      </p:sp>
+      <p:sp>
+        <p:nvSpPr>
+          <p:cNvPr id="7" name="Rounded Rectangle 6"/>
           <p:cNvSpPr/>
           <p:nvPr/>
         </p:nvSpPr>
         <p:spPr>
           <a:xfrm>
-            <a:off x="731520" y="3931920"/>
-            <a:ext cx="5212080" cy="1508760"/>
+            <a:off x="6309359" y="1463040"/>
+            <a:ext cx="2560320" cy="3931920"/>
           </a:xfrm>
           <a:prstGeom prst="roundRect">
             <a:avLst/>
@@ -6309,7 +5739,7 @@
           </a:fontRef>
         </p:style>
         <p:txBody>
-          <a:bodyPr lIns="274320" tIns="164592" rtlCol="0" anchor="ctr"/>
+          <a:bodyPr lIns="182880" tIns="228600" rtlCol="0" anchor="ctr"/>
           <a:lstStyle/>
           <a:p>
             <a:pPr algn="ctr">
@@ -6320,66 +5750,66 @@
               </a:defRPr>
             </a:pPr>
             <a:r>
-              <a:t>3. DERIVED BUSINESS INDICATORS</a:t>
+              <a:t>03. BRAND &amp; LUXURY PRESTIGE</a:t>
             </a:r>
           </a:p>
           <a:p>
             <a:pPr>
               <a:spcBef>
-                <a:spcPts val="300"/>
+                <a:spcPts val="800"/>
               </a:spcBef>
-              <a:defRPr sz="950">
+              <a:defRPr sz="1000">
                 <a:solidFill>
                   <a:srgbClr val="64748B"/>
                 </a:solidFill>
               </a:defRPr>
             </a:pPr>
             <a:r>
-              <a:t>• Engineered 'Miles per Year' to separate heavy fleet wear from commuter cars.</a:t>
+              <a:t>• Prestige brands (Porsche, BMW, Mercedes) follow distinct value curves.</a:t>
             </a:r>
           </a:p>
           <a:p>
             <a:pPr>
               <a:spcBef>
-                <a:spcPts val="300"/>
+                <a:spcPts val="800"/>
               </a:spcBef>
-              <a:defRPr sz="950">
+              <a:defRPr sz="1000">
                 <a:solidFill>
                   <a:srgbClr val="64748B"/>
                 </a:solidFill>
               </a:defRPr>
             </a:pPr>
             <a:r>
-              <a:t>• Flagged Luxury Brand tiers to capture distinct luxury depreciation behavior.</a:t>
+              <a:t>• Economy brands (Toyota, Honda) offer steady, predictable resale.</a:t>
             </a:r>
           </a:p>
           <a:p>
             <a:pPr>
               <a:spcBef>
-                <a:spcPts val="300"/>
+                <a:spcPts val="800"/>
               </a:spcBef>
-              <a:defRPr sz="950">
+              <a:defRPr sz="1000">
                 <a:solidFill>
                   <a:srgbClr val="64748B"/>
                 </a:solidFill>
               </a:defRPr>
             </a:pPr>
             <a:r>
-              <a:t>• Encoded transmission, fuel type, and clean title status into market signals.</a:t>
-            </a:r>
-          </a:p>
-        </p:txBody>
-      </p:sp>
-      <p:sp>
-        <p:nvSpPr>
-          <p:cNvPr id="9" name="Rounded Rectangle 8"/>
+              <a:t>• Prevents applying budget car depreciation rules to luxury cars.</a:t>
+            </a:r>
+          </a:p>
+        </p:txBody>
+      </p:sp>
+      <p:sp>
+        <p:nvSpPr>
+          <p:cNvPr id="8" name="Rounded Rectangle 7"/>
           <p:cNvSpPr/>
           <p:nvPr/>
         </p:nvSpPr>
         <p:spPr>
           <a:xfrm>
-            <a:off x="6217920" y="3931920"/>
-            <a:ext cx="5212080" cy="1508760"/>
+            <a:off x="9098280" y="1463040"/>
+            <a:ext cx="2560320" cy="3931920"/>
           </a:xfrm>
           <a:prstGeom prst="roundRect">
             <a:avLst/>
@@ -6408,7 +5838,7 @@
           </a:fontRef>
         </p:style>
         <p:txBody>
-          <a:bodyPr lIns="274320" tIns="164592" rtlCol="0" anchor="ctr"/>
+          <a:bodyPr lIns="182880" tIns="228600" rtlCol="0" anchor="ctr"/>
           <a:lstStyle/>
           <a:p>
             <a:pPr algn="ctr">
@@ -6419,66 +5849,66 @@
               </a:defRPr>
             </a:pPr>
             <a:r>
-              <a:t>4. STRICT UNSEEN BENCHMARK</a:t>
+              <a:t>04. TITLE &amp; ACCIDENT RECORD</a:t>
             </a:r>
           </a:p>
           <a:p>
             <a:pPr>
               <a:spcBef>
-                <a:spcPts val="300"/>
+                <a:spcPts val="800"/>
               </a:spcBef>
-              <a:defRPr sz="950">
+              <a:defRPr sz="1000">
                 <a:solidFill>
                   <a:srgbClr val="64748B"/>
                 </a:solidFill>
               </a:defRPr>
             </a:pPr>
             <a:r>
-              <a:t>• Reserved 20% of all data (802 vehicles) completely untouched.</a:t>
+              <a:t>• Clean title verification is a prerequisite for fair trade-in value.</a:t>
             </a:r>
           </a:p>
           <a:p>
             <a:pPr>
               <a:spcBef>
-                <a:spcPts val="300"/>
+                <a:spcPts val="800"/>
               </a:spcBef>
-              <a:defRPr sz="950">
+              <a:defRPr sz="1000">
                 <a:solidFill>
                   <a:srgbClr val="64748B"/>
                 </a:solidFill>
               </a:defRPr>
             </a:pPr>
             <a:r>
-              <a:t>• Evaluated models strictly on unseen cars to simulate live customer arrivals.</a:t>
+              <a:t>• Salvage or rebuilt titles trigger steep wholesale penalties.</a:t>
             </a:r>
           </a:p>
           <a:p>
             <a:pPr>
               <a:spcBef>
-                <a:spcPts val="300"/>
+                <a:spcPts val="800"/>
               </a:spcBef>
-              <a:defRPr sz="950">
+              <a:defRPr sz="1000">
                 <a:solidFill>
                   <a:srgbClr val="64748B"/>
                 </a:solidFill>
               </a:defRPr>
             </a:pPr>
             <a:r>
-              <a:t>• Guarantees that reported accuracy reflects real-world commercial performance.</a:t>
-            </a:r>
-          </a:p>
-        </p:txBody>
-      </p:sp>
-      <p:sp>
-        <p:nvSpPr>
-          <p:cNvPr id="10" name="Rounded Rectangle 9"/>
+              <a:t>• Prior accident history significantly dampens resale demand.</a:t>
+            </a:r>
+          </a:p>
+        </p:txBody>
+      </p:sp>
+      <p:sp>
+        <p:nvSpPr>
+          <p:cNvPr id="9" name="Rounded Rectangle 8"/>
           <p:cNvSpPr/>
           <p:nvPr/>
         </p:nvSpPr>
         <p:spPr>
           <a:xfrm>
-            <a:off x="731520" y="5623560"/>
-            <a:ext cx="10728655" cy="594360"/>
+            <a:off x="731520" y="5577840"/>
+            <a:ext cx="10728655" cy="685800"/>
           </a:xfrm>
           <a:prstGeom prst="roundRect">
             <a:avLst/>
@@ -6511,14 +5941,14 @@
           <a:lstStyle/>
           <a:p>
             <a:pPr algn="ctr">
-              <a:defRPr sz="1050" b="1">
+              <a:defRPr sz="1100" b="1">
                 <a:solidFill>
                   <a:srgbClr val="2563EB"/>
                 </a:solidFill>
               </a:defRPr>
             </a:pPr>
             <a:r>
-              <a:t>KEY TAKEAWAY: Rigorous data preprocessing ensures the system learns genuine market behavior rather than statistical noise.</a:t>
+              <a:t>BUSINESS INSIGHT: "True market value comes from the compound interaction of age, usage rate, brand prestige, and title status."</a:t>
             </a:r>
           </a:p>
         </p:txBody>
@@ -6623,597 +6053,6 @@
               </a:defRPr>
             </a:pPr>
             <a:r>
-              <a:t>MARKET DISCOVERIES</a:t>
-            </a:r>
-          </a:p>
-        </p:txBody>
-      </p:sp>
-      <p:sp>
-        <p:nvSpPr>
-          <p:cNvPr id="4" name="TextBox 3"/>
-          <p:cNvSpPr txBox="1"/>
-          <p:nvPr/>
-        </p:nvSpPr>
-        <p:spPr>
-          <a:xfrm>
-            <a:off x="731520" y="658368"/>
-            <a:ext cx="10515600" cy="594360"/>
-          </a:xfrm>
-          <a:prstGeom prst="rect">
-            <a:avLst/>
-          </a:prstGeom>
-          <a:noFill/>
-        </p:spPr>
-        <p:txBody>
-          <a:bodyPr wrap="square" lIns="0" tIns="0" rIns="0" bIns="0">
-            <a:spAutoFit/>
-          </a:bodyPr>
-          <a:lstStyle/>
-          <a:p>
-            <a:pPr>
-              <a:defRPr sz="2400" b="1">
-                <a:solidFill>
-                  <a:srgbClr val="0F172A"/>
-                </a:solidFill>
-                <a:latin typeface="Arial"/>
-              </a:defRPr>
-            </a:pPr>
-            <a:r>
-              <a:t>Key Market Drivers: What Truly Dictates Vehicle Resale Value?</a:t>
-            </a:r>
-          </a:p>
-        </p:txBody>
-      </p:sp>
-      <p:sp>
-        <p:nvSpPr>
-          <p:cNvPr id="5" name="Rounded Rectangle 4"/>
-          <p:cNvSpPr/>
-          <p:nvPr/>
-        </p:nvSpPr>
-        <p:spPr>
-          <a:xfrm>
-            <a:off x="731520" y="1463040"/>
-            <a:ext cx="2560320" cy="3931920"/>
-          </a:xfrm>
-          <a:prstGeom prst="roundRect">
-            <a:avLst/>
-          </a:prstGeom>
-          <a:solidFill>
-            <a:srgbClr val="FFFFFF"/>
-          </a:solidFill>
-          <a:ln>
-            <a:solidFill>
-              <a:srgbClr val="E2E8F0"/>
-            </a:solidFill>
-          </a:ln>
-        </p:spPr>
-        <p:style>
-          <a:lnRef idx="1">
-            <a:schemeClr val="accent1"/>
-          </a:lnRef>
-          <a:fillRef idx="3">
-            <a:schemeClr val="accent1"/>
-          </a:fillRef>
-          <a:effectRef idx="2">
-            <a:schemeClr val="accent1"/>
-          </a:effectRef>
-          <a:fontRef idx="minor">
-            <a:schemeClr val="lt1"/>
-          </a:fontRef>
-        </p:style>
-        <p:txBody>
-          <a:bodyPr lIns="182880" tIns="228600" rtlCol="0" anchor="ctr"/>
-          <a:lstStyle/>
-          <a:p>
-            <a:pPr algn="ctr">
-              <a:defRPr sz="1100" b="1">
-                <a:solidFill>
-                  <a:srgbClr val="2563EB"/>
-                </a:solidFill>
-              </a:defRPr>
-            </a:pPr>
-            <a:r>
-              <a:t>01. AGE &amp; USAGE INTENSITY</a:t>
-            </a:r>
-          </a:p>
-          <a:p>
-            <a:pPr>
-              <a:spcBef>
-                <a:spcPts val="800"/>
-              </a:spcBef>
-              <a:defRPr sz="1000">
-                <a:solidFill>
-                  <a:srgbClr val="64748B"/>
-                </a:solidFill>
-              </a:defRPr>
-            </a:pPr>
-            <a:r>
-              <a:t>• Year-over-year mechanical and technological depreciation.</a:t>
-            </a:r>
-          </a:p>
-          <a:p>
-            <a:pPr>
-              <a:spcBef>
-                <a:spcPts val="800"/>
-              </a:spcBef>
-              <a:defRPr sz="1000">
-                <a:solidFill>
-                  <a:srgbClr val="64748B"/>
-                </a:solidFill>
-              </a:defRPr>
-            </a:pPr>
-            <a:r>
-              <a:t>• Annual usage rate differentiates commuter cars from fleet wear.</a:t>
-            </a:r>
-          </a:p>
-          <a:p>
-            <a:pPr>
-              <a:spcBef>
-                <a:spcPts val="800"/>
-              </a:spcBef>
-              <a:defRPr sz="1000">
-                <a:solidFill>
-                  <a:srgbClr val="64748B"/>
-                </a:solidFill>
-              </a:defRPr>
-            </a:pPr>
-            <a:r>
-              <a:t>• Age alone is misleading without knowing yearly usage intensity.</a:t>
-            </a:r>
-          </a:p>
-        </p:txBody>
-      </p:sp>
-      <p:sp>
-        <p:nvSpPr>
-          <p:cNvPr id="6" name="Rounded Rectangle 5"/>
-          <p:cNvSpPr/>
-          <p:nvPr/>
-        </p:nvSpPr>
-        <p:spPr>
-          <a:xfrm>
-            <a:off x="3520439" y="1463040"/>
-            <a:ext cx="2560320" cy="3931920"/>
-          </a:xfrm>
-          <a:prstGeom prst="roundRect">
-            <a:avLst/>
-          </a:prstGeom>
-          <a:solidFill>
-            <a:srgbClr val="FFFFFF"/>
-          </a:solidFill>
-          <a:ln>
-            <a:solidFill>
-              <a:srgbClr val="E2E8F0"/>
-            </a:solidFill>
-          </a:ln>
-        </p:spPr>
-        <p:style>
-          <a:lnRef idx="1">
-            <a:schemeClr val="accent1"/>
-          </a:lnRef>
-          <a:fillRef idx="3">
-            <a:schemeClr val="accent1"/>
-          </a:fillRef>
-          <a:effectRef idx="2">
-            <a:schemeClr val="accent1"/>
-          </a:effectRef>
-          <a:fontRef idx="minor">
-            <a:schemeClr val="lt1"/>
-          </a:fontRef>
-        </p:style>
-        <p:txBody>
-          <a:bodyPr lIns="182880" tIns="228600" rtlCol="0" anchor="ctr"/>
-          <a:lstStyle/>
-          <a:p>
-            <a:pPr algn="ctr">
-              <a:defRPr sz="1100" b="1">
-                <a:solidFill>
-                  <a:srgbClr val="2563EB"/>
-                </a:solidFill>
-              </a:defRPr>
-            </a:pPr>
-            <a:r>
-              <a:t>02. ODOMETER MILEAGE</a:t>
-            </a:r>
-          </a:p>
-          <a:p>
-            <a:pPr>
-              <a:spcBef>
-                <a:spcPts val="800"/>
-              </a:spcBef>
-              <a:defRPr sz="1000">
-                <a:solidFill>
-                  <a:srgbClr val="64748B"/>
-                </a:solidFill>
-              </a:defRPr>
-            </a:pPr>
-            <a:r>
-              <a:t>• Primary indicator of physical mechanical wear.</a:t>
-            </a:r>
-          </a:p>
-          <a:p>
-            <a:pPr>
-              <a:spcBef>
-                <a:spcPts val="800"/>
-              </a:spcBef>
-              <a:defRPr sz="1000">
-                <a:solidFill>
-                  <a:srgbClr val="64748B"/>
-                </a:solidFill>
-              </a:defRPr>
-            </a:pPr>
-            <a:r>
-              <a:t>• Strongest day-to-day downward price driver.</a:t>
-            </a:r>
-          </a:p>
-          <a:p>
-            <a:pPr>
-              <a:spcBef>
-                <a:spcPts val="800"/>
-              </a:spcBef>
-              <a:defRPr sz="1000">
-                <a:solidFill>
-                  <a:srgbClr val="64748B"/>
-                </a:solidFill>
-              </a:defRPr>
-            </a:pPr>
-            <a:r>
-              <a:t>• Depreciation penalty naturally flattens at higher mileage thresholds.</a:t>
-            </a:r>
-          </a:p>
-        </p:txBody>
-      </p:sp>
-      <p:sp>
-        <p:nvSpPr>
-          <p:cNvPr id="7" name="Rounded Rectangle 6"/>
-          <p:cNvSpPr/>
-          <p:nvPr/>
-        </p:nvSpPr>
-        <p:spPr>
-          <a:xfrm>
-            <a:off x="6309359" y="1463040"/>
-            <a:ext cx="2560320" cy="3931920"/>
-          </a:xfrm>
-          <a:prstGeom prst="roundRect">
-            <a:avLst/>
-          </a:prstGeom>
-          <a:solidFill>
-            <a:srgbClr val="FFFFFF"/>
-          </a:solidFill>
-          <a:ln>
-            <a:solidFill>
-              <a:srgbClr val="E2E8F0"/>
-            </a:solidFill>
-          </a:ln>
-        </p:spPr>
-        <p:style>
-          <a:lnRef idx="1">
-            <a:schemeClr val="accent1"/>
-          </a:lnRef>
-          <a:fillRef idx="3">
-            <a:schemeClr val="accent1"/>
-          </a:fillRef>
-          <a:effectRef idx="2">
-            <a:schemeClr val="accent1"/>
-          </a:effectRef>
-          <a:fontRef idx="minor">
-            <a:schemeClr val="lt1"/>
-          </a:fontRef>
-        </p:style>
-        <p:txBody>
-          <a:bodyPr lIns="182880" tIns="228600" rtlCol="0" anchor="ctr"/>
-          <a:lstStyle/>
-          <a:p>
-            <a:pPr algn="ctr">
-              <a:defRPr sz="1100" b="1">
-                <a:solidFill>
-                  <a:srgbClr val="2563EB"/>
-                </a:solidFill>
-              </a:defRPr>
-            </a:pPr>
-            <a:r>
-              <a:t>03. BRAND &amp; LUXURY PRESTIGE</a:t>
-            </a:r>
-          </a:p>
-          <a:p>
-            <a:pPr>
-              <a:spcBef>
-                <a:spcPts val="800"/>
-              </a:spcBef>
-              <a:defRPr sz="1000">
-                <a:solidFill>
-                  <a:srgbClr val="64748B"/>
-                </a:solidFill>
-              </a:defRPr>
-            </a:pPr>
-            <a:r>
-              <a:t>• Prestige brands (Porsche, BMW, Mercedes) follow distinct value curves.</a:t>
-            </a:r>
-          </a:p>
-          <a:p>
-            <a:pPr>
-              <a:spcBef>
-                <a:spcPts val="800"/>
-              </a:spcBef>
-              <a:defRPr sz="1000">
-                <a:solidFill>
-                  <a:srgbClr val="64748B"/>
-                </a:solidFill>
-              </a:defRPr>
-            </a:pPr>
-            <a:r>
-              <a:t>• Economy brands (Toyota, Honda) offer steady, predictable resale.</a:t>
-            </a:r>
-          </a:p>
-          <a:p>
-            <a:pPr>
-              <a:spcBef>
-                <a:spcPts val="800"/>
-              </a:spcBef>
-              <a:defRPr sz="1000">
-                <a:solidFill>
-                  <a:srgbClr val="64748B"/>
-                </a:solidFill>
-              </a:defRPr>
-            </a:pPr>
-            <a:r>
-              <a:t>• Prevents applying budget car depreciation rules to luxury cars.</a:t>
-            </a:r>
-          </a:p>
-        </p:txBody>
-      </p:sp>
-      <p:sp>
-        <p:nvSpPr>
-          <p:cNvPr id="8" name="Rounded Rectangle 7"/>
-          <p:cNvSpPr/>
-          <p:nvPr/>
-        </p:nvSpPr>
-        <p:spPr>
-          <a:xfrm>
-            <a:off x="9098280" y="1463040"/>
-            <a:ext cx="2560320" cy="3931920"/>
-          </a:xfrm>
-          <a:prstGeom prst="roundRect">
-            <a:avLst/>
-          </a:prstGeom>
-          <a:solidFill>
-            <a:srgbClr val="FFFFFF"/>
-          </a:solidFill>
-          <a:ln>
-            <a:solidFill>
-              <a:srgbClr val="E2E8F0"/>
-            </a:solidFill>
-          </a:ln>
-        </p:spPr>
-        <p:style>
-          <a:lnRef idx="1">
-            <a:schemeClr val="accent1"/>
-          </a:lnRef>
-          <a:fillRef idx="3">
-            <a:schemeClr val="accent1"/>
-          </a:fillRef>
-          <a:effectRef idx="2">
-            <a:schemeClr val="accent1"/>
-          </a:effectRef>
-          <a:fontRef idx="minor">
-            <a:schemeClr val="lt1"/>
-          </a:fontRef>
-        </p:style>
-        <p:txBody>
-          <a:bodyPr lIns="182880" tIns="228600" rtlCol="0" anchor="ctr"/>
-          <a:lstStyle/>
-          <a:p>
-            <a:pPr algn="ctr">
-              <a:defRPr sz="1100" b="1">
-                <a:solidFill>
-                  <a:srgbClr val="2563EB"/>
-                </a:solidFill>
-              </a:defRPr>
-            </a:pPr>
-            <a:r>
-              <a:t>04. TITLE &amp; ACCIDENT RECORD</a:t>
-            </a:r>
-          </a:p>
-          <a:p>
-            <a:pPr>
-              <a:spcBef>
-                <a:spcPts val="800"/>
-              </a:spcBef>
-              <a:defRPr sz="1000">
-                <a:solidFill>
-                  <a:srgbClr val="64748B"/>
-                </a:solidFill>
-              </a:defRPr>
-            </a:pPr>
-            <a:r>
-              <a:t>• Clean title verification is a prerequisite for fair trade-in value.</a:t>
-            </a:r>
-          </a:p>
-          <a:p>
-            <a:pPr>
-              <a:spcBef>
-                <a:spcPts val="800"/>
-              </a:spcBef>
-              <a:defRPr sz="1000">
-                <a:solidFill>
-                  <a:srgbClr val="64748B"/>
-                </a:solidFill>
-              </a:defRPr>
-            </a:pPr>
-            <a:r>
-              <a:t>• Salvage or rebuilt titles trigger steep wholesale penalties.</a:t>
-            </a:r>
-          </a:p>
-          <a:p>
-            <a:pPr>
-              <a:spcBef>
-                <a:spcPts val="800"/>
-              </a:spcBef>
-              <a:defRPr sz="1000">
-                <a:solidFill>
-                  <a:srgbClr val="64748B"/>
-                </a:solidFill>
-              </a:defRPr>
-            </a:pPr>
-            <a:r>
-              <a:t>• Prior accident history significantly dampens resale demand.</a:t>
-            </a:r>
-          </a:p>
-        </p:txBody>
-      </p:sp>
-      <p:sp>
-        <p:nvSpPr>
-          <p:cNvPr id="9" name="Rounded Rectangle 8"/>
-          <p:cNvSpPr/>
-          <p:nvPr/>
-        </p:nvSpPr>
-        <p:spPr>
-          <a:xfrm>
-            <a:off x="731520" y="5577840"/>
-            <a:ext cx="10728655" cy="685800"/>
-          </a:xfrm>
-          <a:prstGeom prst="roundRect">
-            <a:avLst/>
-          </a:prstGeom>
-          <a:solidFill>
-            <a:srgbClr val="EFF6FF"/>
-          </a:solidFill>
-          <a:ln>
-            <a:solidFill>
-              <a:srgbClr val="2563EB"/>
-            </a:solidFill>
-          </a:ln>
-        </p:spPr>
-        <p:style>
-          <a:lnRef idx="1">
-            <a:schemeClr val="accent1"/>
-          </a:lnRef>
-          <a:fillRef idx="3">
-            <a:schemeClr val="accent1"/>
-          </a:fillRef>
-          <a:effectRef idx="2">
-            <a:schemeClr val="accent1"/>
-          </a:effectRef>
-          <a:fontRef idx="minor">
-            <a:schemeClr val="lt1"/>
-          </a:fontRef>
-        </p:style>
-        <p:txBody>
-          <a:bodyPr rtlCol="0" anchor="ctr"/>
-          <a:lstStyle/>
-          <a:p>
-            <a:pPr algn="ctr">
-              <a:defRPr sz="1100" b="1">
-                <a:solidFill>
-                  <a:srgbClr val="2563EB"/>
-                </a:solidFill>
-              </a:defRPr>
-            </a:pPr>
-            <a:r>
-              <a:t>BUSINESS INSIGHT: "True market value comes from the compound interaction of age, usage rate, brand prestige, and title status."</a:t>
-            </a:r>
-          </a:p>
-        </p:txBody>
-      </p:sp>
-    </p:spTree>
-  </p:cSld>
-  <p:clrMapOvr>
-    <a:masterClrMapping/>
-  </p:clrMapOvr>
-</p:sld>
-</file>
-
-<file path=ppt/slides/slide6.xml><?xml version="1.0" encoding="utf-8"?>
-<p:sld xmlns:a="http://schemas.openxmlformats.org/drawingml/2006/main" xmlns:r="http://schemas.openxmlformats.org/officeDocument/2006/relationships" xmlns:p="http://schemas.openxmlformats.org/presentationml/2006/main">
-  <p:cSld>
-    <p:spTree>
-      <p:nvGrpSpPr>
-        <p:cNvPr id="1" name=""/>
-        <p:cNvGrpSpPr/>
-        <p:nvPr/>
-      </p:nvGrpSpPr>
-      <p:grpSpPr>
-        <a:xfrm>
-          <a:off x="0" y="0"/>
-          <a:ext cx="0" cy="0"/>
-          <a:chOff x="0" y="0"/>
-          <a:chExt cx="0" cy="0"/>
-        </a:xfrm>
-      </p:grpSpPr>
-      <p:sp>
-        <p:nvSpPr>
-          <p:cNvPr id="2" name="Rectangle 1"/>
-          <p:cNvSpPr/>
-          <p:nvPr/>
-        </p:nvSpPr>
-        <p:spPr>
-          <a:xfrm>
-            <a:off x="0" y="0"/>
-            <a:ext cx="12191695" cy="6858000"/>
-          </a:xfrm>
-          <a:prstGeom prst="rect">
-            <a:avLst/>
-          </a:prstGeom>
-          <a:solidFill>
-            <a:srgbClr val="F8FAFC"/>
-          </a:solidFill>
-          <a:ln>
-            <a:noFill/>
-          </a:ln>
-        </p:spPr>
-        <p:style>
-          <a:lnRef idx="1">
-            <a:schemeClr val="accent1"/>
-          </a:lnRef>
-          <a:fillRef idx="3">
-            <a:schemeClr val="accent1"/>
-          </a:fillRef>
-          <a:effectRef idx="2">
-            <a:schemeClr val="accent1"/>
-          </a:effectRef>
-          <a:fontRef idx="minor">
-            <a:schemeClr val="lt1"/>
-          </a:fontRef>
-        </p:style>
-        <p:txBody>
-          <a:bodyPr rtlCol="0" anchor="ctr"/>
-          <a:lstStyle/>
-          <a:p>
-            <a:pPr algn="ctr"/>
-            <a:endParaRPr/>
-          </a:p>
-        </p:txBody>
-      </p:sp>
-      <p:sp>
-        <p:nvSpPr>
-          <p:cNvPr id="3" name="TextBox 2"/>
-          <p:cNvSpPr txBox="1"/>
-          <p:nvPr/>
-        </p:nvSpPr>
-        <p:spPr>
-          <a:xfrm>
-            <a:off x="731520" y="384048"/>
-            <a:ext cx="8686800" cy="292608"/>
-          </a:xfrm>
-          <a:prstGeom prst="rect">
-            <a:avLst/>
-          </a:prstGeom>
-          <a:noFill/>
-        </p:spPr>
-        <p:txBody>
-          <a:bodyPr wrap="square" lIns="0" tIns="0" rIns="0" bIns="0">
-            <a:spAutoFit/>
-          </a:bodyPr>
-          <a:lstStyle/>
-          <a:p>
-            <a:pPr>
-              <a:defRPr sz="1100" b="1">
-                <a:solidFill>
-                  <a:srgbClr val="2563EB"/>
-                </a:solidFill>
-                <a:latin typeface="Arial"/>
-              </a:defRPr>
-            </a:pPr>
-            <a:r>
               <a:t>MODELING STRATEGY</a:t>
             </a:r>
           </a:p>
@@ -7771,7 +6610,7 @@
 </p:sld>
 </file>
 
-<file path=ppt/slides/slide7.xml><?xml version="1.0" encoding="utf-8"?>
+<file path=ppt/slides/slide6.xml><?xml version="1.0" encoding="utf-8"?>
 <p:sld xmlns:a="http://schemas.openxmlformats.org/drawingml/2006/main" xmlns:r="http://schemas.openxmlformats.org/officeDocument/2006/relationships" xmlns:p="http://schemas.openxmlformats.org/presentationml/2006/main">
   <p:cSld>
     <p:spTree>
@@ -8657,7 +7496,7 @@
 </p:sld>
 </file>
 
-<file path=ppt/slides/slide8.xml><?xml version="1.0" encoding="utf-8"?>
+<file path=ppt/slides/slide7.xml><?xml version="1.0" encoding="utf-8"?>
 <p:sld xmlns:a="http://schemas.openxmlformats.org/drawingml/2006/main" xmlns:r="http://schemas.openxmlformats.org/officeDocument/2006/relationships" xmlns:p="http://schemas.openxmlformats.org/presentationml/2006/main">
   <p:cSld>
     <p:spTree>
@@ -9185,7 +8024,7 @@
 </p:sld>
 </file>
 
-<file path=ppt/slides/slide9.xml><?xml version="1.0" encoding="utf-8"?>
+<file path=ppt/slides/slide8.xml><?xml version="1.0" encoding="utf-8"?>
 <p:sld xmlns:a="http://schemas.openxmlformats.org/drawingml/2006/main" xmlns:r="http://schemas.openxmlformats.org/officeDocument/2006/relationships" xmlns:p="http://schemas.openxmlformats.org/presentationml/2006/main">
   <p:cSld>
     <p:spTree>
